--- a/pdf/basic/03_Unity基础_场景组件与打包.pptx
+++ b/pdf/basic/03_Unity基础_场景组件与打包.pptx
@@ -13574,8 +13574,8 @@
         </p:nvGrpSpPr>
         <p:grpSpPr>
           <a:xfrm>
-            <a:off x="590550" y="1476375"/>
-            <a:ext cx="3905250" cy="4114800"/>
+            <a:off x="934085" y="1476375"/>
+            <a:ext cx="3475355" cy="2124710"/>
             <a:chOff x="590550" y="1476375"/>
             <a:chExt cx="3905250" cy="4114800"/>
           </a:xfrm>
@@ -13614,8 +13614,8 @@
           </p:nvSpPr>
           <p:spPr>
             <a:xfrm>
-              <a:off x="862584" y="1699260"/>
-              <a:ext cx="1935670" cy="528066"/>
+              <a:off x="862412" y="1698963"/>
+              <a:ext cx="859112" cy="2420181"/>
             </a:xfrm>
             <a:prstGeom prst="rect">
               <a:avLst/>
@@ -13626,8 +13626,8 @@
             </a:ln>
           </p:spPr>
           <p:txBody>
-            <a:bodyPr wrap="none" lIns="0" tIns="0" rIns="0" bIns="0" anchor="t" anchorCtr="0">
-              <a:spAutoFit/>
+            <a:bodyPr wrap="square" lIns="0" tIns="0" rIns="0" bIns="0" anchor="t" anchorCtr="0">
+              <a:noAutofit/>
             </a:bodyPr>
             <a:lstStyle/>
             <a:p>
@@ -13663,9 +13663,9 @@
           <p:grpSpPr>
             <a:xfrm>
               <a:off x="1858056" y="2263167"/>
-              <a:ext cx="1697956" cy="1898242"/>
+              <a:ext cx="1697956" cy="2082376"/>
               <a:chOff x="1858056" y="2263167"/>
-              <a:chExt cx="1697956" cy="1898242"/>
+              <a:chExt cx="1697956" cy="2082376"/>
             </a:xfrm>
           </p:grpSpPr>
           <p:sp>
@@ -13935,7 +13935,7 @@
             <p:spPr>
               <a:xfrm>
                 <a:off x="3396906" y="3809365"/>
-                <a:ext cx="159106" cy="352044"/>
+                <a:ext cx="159106" cy="536178"/>
               </a:xfrm>
               <a:prstGeom prst="rect">
                 <a:avLst/>
@@ -13946,7 +13946,7 @@
               </a:ln>
             </p:spPr>
             <p:txBody>
-              <a:bodyPr wrap="none" lIns="0" tIns="0" rIns="0" bIns="0" anchor="t" anchorCtr="0">
+              <a:bodyPr wrap="square" lIns="0" tIns="0" rIns="0" bIns="0" anchor="t" anchorCtr="0">
                 <a:spAutoFit/>
               </a:bodyPr>
               <a:lstStyle/>
@@ -13983,7 +13983,7 @@
             <p:spPr>
               <a:xfrm>
                 <a:off x="2172081" y="2263167"/>
-                <a:ext cx="159106" cy="352044"/>
+                <a:ext cx="159106" cy="566469"/>
               </a:xfrm>
               <a:prstGeom prst="rect">
                 <a:avLst/>
@@ -13994,7 +13994,7 @@
               </a:ln>
             </p:spPr>
             <p:txBody>
-              <a:bodyPr wrap="none" lIns="0" tIns="0" rIns="0" bIns="0" anchor="t" anchorCtr="0">
+              <a:bodyPr wrap="square" lIns="0" tIns="0" rIns="0" bIns="0" anchor="t" anchorCtr="0">
                 <a:spAutoFit/>
               </a:bodyPr>
               <a:lstStyle/>
@@ -14030,8 +14030,8 @@
             </p:nvSpPr>
             <p:spPr>
               <a:xfrm>
-                <a:off x="2910586" y="3118485"/>
-                <a:ext cx="159106" cy="352044"/>
+                <a:off x="2910586" y="3201453"/>
+                <a:ext cx="159106" cy="566469"/>
               </a:xfrm>
               <a:prstGeom prst="rect">
                 <a:avLst/>
@@ -14042,7 +14042,7 @@
               </a:ln>
             </p:spPr>
             <p:txBody>
-              <a:bodyPr wrap="none" lIns="0" tIns="0" rIns="0" bIns="0" anchor="t" anchorCtr="0">
+              <a:bodyPr wrap="square" lIns="0" tIns="0" rIns="0" bIns="0" anchor="t" anchorCtr="0">
                 <a:spAutoFit/>
               </a:bodyPr>
               <a:lstStyle/>
@@ -14079,7 +14079,7 @@
           </p:nvSpPr>
           <p:spPr>
             <a:xfrm>
-              <a:off x="857250" y="4791075"/>
+              <a:off x="857250" y="4750151"/>
               <a:ext cx="3371850" cy="533400"/>
             </a:xfrm>
             <a:prstGeom prst="roundRect">
@@ -14103,8 +14103,8 @@
           </p:nvSpPr>
           <p:spPr>
             <a:xfrm>
-              <a:off x="1425435" y="4949190"/>
-              <a:ext cx="2235479" cy="352044"/>
+              <a:off x="846160" y="4802901"/>
+              <a:ext cx="3484934" cy="536178"/>
             </a:xfrm>
             <a:prstGeom prst="rect">
               <a:avLst/>
@@ -14115,7 +14115,7 @@
             </a:ln>
           </p:spPr>
           <p:txBody>
-            <a:bodyPr wrap="none" lIns="0" tIns="0" rIns="0" bIns="0" anchor="t" anchorCtr="0">
+            <a:bodyPr wrap="square" lIns="0" tIns="0" rIns="0" bIns="0" anchor="t" anchorCtr="0">
               <a:spAutoFit/>
             </a:bodyPr>
             <a:lstStyle/>
@@ -14152,10 +14152,10 @@
         </p:nvGrpSpPr>
         <p:grpSpPr>
           <a:xfrm>
-            <a:off x="4762500" y="1476375"/>
-            <a:ext cx="6686550" cy="4120134"/>
+            <a:off x="4707890" y="1623060"/>
+            <a:ext cx="6686550" cy="4599940"/>
             <a:chOff x="4762500" y="1476375"/>
-            <a:chExt cx="6686550" cy="4120134"/>
+            <a:chExt cx="6686550" cy="4302760"/>
           </a:xfrm>
         </p:grpSpPr>
         <p:grpSp>
@@ -14434,7 +14434,7 @@
             <p:spPr>
               <a:xfrm>
                 <a:off x="5122330" y="2379345"/>
-                <a:ext cx="1356791" cy="469392"/>
+                <a:ext cx="1356791" cy="345100"/>
               </a:xfrm>
               <a:prstGeom prst="rect">
                 <a:avLst/>
@@ -14445,7 +14445,7 @@
               </a:ln>
             </p:spPr>
             <p:txBody>
-              <a:bodyPr wrap="none" lIns="0" tIns="0" rIns="0" bIns="0" anchor="t" anchorCtr="0">
+              <a:bodyPr wrap="square" lIns="0" tIns="0" rIns="0" bIns="0" anchor="t" anchorCtr="0">
                 <a:spAutoFit/>
               </a:bodyPr>
               <a:lstStyle/>
@@ -14482,7 +14482,7 @@
             <p:spPr>
               <a:xfrm>
                 <a:off x="5428107" y="2787015"/>
-                <a:ext cx="745236" cy="352044"/>
+                <a:ext cx="745236" cy="258973"/>
               </a:xfrm>
               <a:prstGeom prst="rect">
                 <a:avLst/>
@@ -14493,7 +14493,7 @@
               </a:ln>
             </p:spPr>
             <p:txBody>
-              <a:bodyPr wrap="none" lIns="0" tIns="0" rIns="0" bIns="0" anchor="t" anchorCtr="0">
+              <a:bodyPr wrap="square" lIns="0" tIns="0" rIns="0" bIns="0" anchor="t" anchorCtr="0">
                 <a:spAutoFit/>
               </a:bodyPr>
               <a:lstStyle/>
@@ -14649,7 +14649,7 @@
             <p:spPr>
               <a:xfrm>
                 <a:off x="7384674" y="2379345"/>
-                <a:ext cx="1442201" cy="469392"/>
+                <a:ext cx="1442201" cy="345100"/>
               </a:xfrm>
               <a:prstGeom prst="rect">
                 <a:avLst/>
@@ -14660,7 +14660,7 @@
               </a:ln>
             </p:spPr>
             <p:txBody>
-              <a:bodyPr wrap="none" lIns="0" tIns="0" rIns="0" bIns="0" anchor="t" anchorCtr="0">
+              <a:bodyPr wrap="square" lIns="0" tIns="0" rIns="0" bIns="0" anchor="t" anchorCtr="0">
                 <a:spAutoFit/>
               </a:bodyPr>
               <a:lstStyle/>
@@ -14697,7 +14697,7 @@
             <p:spPr>
               <a:xfrm>
                 <a:off x="7611999" y="2787015"/>
-                <a:ext cx="987552" cy="352044"/>
+                <a:ext cx="987552" cy="258973"/>
               </a:xfrm>
               <a:prstGeom prst="rect">
                 <a:avLst/>
@@ -14708,7 +14708,7 @@
               </a:ln>
             </p:spPr>
             <p:txBody>
-              <a:bodyPr wrap="none" lIns="0" tIns="0" rIns="0" bIns="0" anchor="t" anchorCtr="0">
+              <a:bodyPr wrap="square" lIns="0" tIns="0" rIns="0" bIns="0" anchor="t" anchorCtr="0">
                 <a:spAutoFit/>
               </a:bodyPr>
               <a:lstStyle/>
@@ -14866,7 +14866,7 @@
             <p:spPr>
               <a:xfrm>
                 <a:off x="9969779" y="2379345"/>
-                <a:ext cx="882091" cy="469392"/>
+                <a:ext cx="882091" cy="345100"/>
               </a:xfrm>
               <a:prstGeom prst="rect">
                 <a:avLst/>
@@ -14877,7 +14877,7 @@
               </a:ln>
             </p:spPr>
             <p:txBody>
-              <a:bodyPr wrap="none" lIns="0" tIns="0" rIns="0" bIns="0" anchor="t" anchorCtr="0">
+              <a:bodyPr wrap="square" lIns="0" tIns="0" rIns="0" bIns="0" anchor="t" anchorCtr="0">
                 <a:spAutoFit/>
               </a:bodyPr>
               <a:lstStyle/>
@@ -14914,7 +14914,7 @@
             <p:spPr>
               <a:xfrm>
                 <a:off x="10038207" y="2787015"/>
-                <a:ext cx="745236" cy="352044"/>
+                <a:ext cx="745236" cy="258973"/>
               </a:xfrm>
               <a:prstGeom prst="rect">
                 <a:avLst/>
@@ -14925,7 +14925,7 @@
               </a:ln>
             </p:spPr>
             <p:txBody>
-              <a:bodyPr wrap="none" lIns="0" tIns="0" rIns="0" bIns="0" anchor="t" anchorCtr="0">
+              <a:bodyPr wrap="square" lIns="0" tIns="0" rIns="0" bIns="0" anchor="t" anchorCtr="0">
                 <a:spAutoFit/>
               </a:bodyPr>
               <a:lstStyle/>
@@ -14963,7 +14963,7 @@
           <p:spPr>
             <a:xfrm>
               <a:off x="4762500" y="3609975"/>
-              <a:ext cx="6686550" cy="1981200"/>
+              <a:ext cx="6686550" cy="2169160"/>
             </a:xfrm>
             <a:prstGeom prst="roundRect">
               <a:avLst>
@@ -14989,7 +14989,7 @@
           <p:spPr>
             <a:xfrm>
               <a:off x="5015484" y="3756660"/>
-              <a:ext cx="5370500" cy="528066"/>
+              <a:ext cx="5370500" cy="388460"/>
             </a:xfrm>
             <a:prstGeom prst="rect">
               <a:avLst/>
@@ -15000,7 +15000,7 @@
             </a:ln>
           </p:spPr>
           <p:txBody>
-            <a:bodyPr wrap="none" lIns="0" tIns="0" rIns="0" bIns="0" anchor="t" anchorCtr="0">
+            <a:bodyPr wrap="square" lIns="0" tIns="0" rIns="0" bIns="0" anchor="t" anchorCtr="0">
               <a:spAutoFit/>
             </a:bodyPr>
             <a:lstStyle/>
@@ -15220,7 +15220,7 @@
           <p:spPr>
             <a:xfrm>
               <a:off x="7411662" y="4377690"/>
-              <a:ext cx="1369177" cy="352044"/>
+              <a:ext cx="1369177" cy="258973"/>
             </a:xfrm>
             <a:prstGeom prst="rect">
               <a:avLst/>
@@ -15231,7 +15231,7 @@
             </a:ln>
           </p:spPr>
           <p:txBody>
-            <a:bodyPr wrap="none" lIns="0" tIns="0" rIns="0" bIns="0" anchor="t" anchorCtr="0">
+            <a:bodyPr wrap="square" lIns="0" tIns="0" rIns="0" bIns="0" anchor="t" anchorCtr="0">
               <a:spAutoFit/>
             </a:bodyPr>
             <a:lstStyle/>
@@ -15294,7 +15294,7 @@
           <p:spPr>
             <a:xfrm>
               <a:off x="5992063" y="5244465"/>
-              <a:ext cx="703174" cy="352044"/>
+              <a:ext cx="703174" cy="258973"/>
             </a:xfrm>
             <a:prstGeom prst="rect">
               <a:avLst/>
@@ -15305,7 +15305,7 @@
             </a:ln>
           </p:spPr>
           <p:txBody>
-            <a:bodyPr wrap="none" lIns="0" tIns="0" rIns="0" bIns="0" anchor="t" anchorCtr="0">
+            <a:bodyPr wrap="square" lIns="0" tIns="0" rIns="0" bIns="0" anchor="t" anchorCtr="0">
               <a:spAutoFit/>
             </a:bodyPr>
             <a:lstStyle/>
@@ -15368,7 +15368,7 @@
           <p:spPr>
             <a:xfrm>
               <a:off x="9105277" y="5244465"/>
-              <a:ext cx="1487147" cy="352044"/>
+              <a:ext cx="1487147" cy="258973"/>
             </a:xfrm>
             <a:prstGeom prst="rect">
               <a:avLst/>
@@ -15379,7 +15379,7 @@
             </a:ln>
           </p:spPr>
           <p:txBody>
-            <a:bodyPr wrap="none" lIns="0" tIns="0" rIns="0" bIns="0" anchor="t" anchorCtr="0">
+            <a:bodyPr wrap="square" lIns="0" tIns="0" rIns="0" bIns="0" anchor="t" anchorCtr="0">
               <a:spAutoFit/>
             </a:bodyPr>
             <a:lstStyle/>
@@ -15507,6 +15507,243 @@
           </p:txBody>
         </p:sp>
       </p:grpSp>
+      <p:sp>
+        <p:nvSpPr>
+          <p:cNvPr id="56" name="Rectangle 29"/>
+          <p:cNvSpPr/>
+          <p:nvPr/>
+        </p:nvSpPr>
+        <p:spPr>
+          <a:xfrm>
+            <a:off x="593725" y="3756660"/>
+            <a:ext cx="3724910" cy="2487930"/>
+          </a:xfrm>
+          <a:prstGeom prst="roundRect">
+            <a:avLst>
+              <a:gd name="adj" fmla="val 12245"/>
+            </a:avLst>
+          </a:prstGeom>
+          <a:solidFill>
+            <a:srgbClr val="E8F5F0"/>
+          </a:solidFill>
+          <a:ln w="28575">
+            <a:solidFill>
+              <a:schemeClr val="accent3"/>
+            </a:solidFill>
+          </a:ln>
+        </p:spPr>
+        <p:txBody>
+          <a:bodyPr/>
+          <a:p>
+            <a:r>
+              <a:rPr lang="en-US" altLang="zh-CN"/>
+              <a:t>rotation * dir / trans.TransDir</a:t>
+            </a:r>
+            <a:endParaRPr lang="en-US" altLang="zh-CN"/>
+          </a:p>
+          <a:p>
+            <a:r>
+              <a:rPr lang="zh-CN" altLang="en-US"/>
+              <a:t>局部</a:t>
+            </a:r>
+            <a:r>
+              <a:rPr lang="en-US" altLang="zh-CN"/>
+              <a:t> -</a:t>
+            </a:r>
+            <a:r>
+              <a:rPr lang="zh-CN" altLang="en-US"/>
+              <a:t>》世界（</a:t>
+            </a:r>
+            <a:r>
+              <a:rPr lang="en-US" altLang="zh-CN"/>
+              <a:t>0</a:t>
+            </a:r>
+            <a:r>
+              <a:rPr lang="zh-CN" altLang="en-US"/>
+              <a:t>，</a:t>
+            </a:r>
+            <a:r>
+              <a:rPr lang="en-US" altLang="zh-CN"/>
+              <a:t>1</a:t>
+            </a:r>
+            <a:r>
+              <a:rPr lang="zh-CN" altLang="en-US"/>
+              <a:t>）</a:t>
+            </a:r>
+            <a:r>
+              <a:rPr lang="en-US" altLang="zh-CN"/>
+              <a:t>-&gt;(1,0)</a:t>
+            </a:r>
+            <a:endParaRPr lang="en-US" altLang="zh-CN"/>
+          </a:p>
+          <a:p>
+            <a:r>
+              <a:rPr lang="zh-CN" altLang="en-US"/>
+              <a:t>我视角的方向在世界的</a:t>
+            </a:r>
+            <a:r>
+              <a:rPr lang="zh-CN" altLang="en-US"/>
+              <a:t>情况</a:t>
+            </a:r>
+            <a:endParaRPr lang="zh-CN" altLang="en-US"/>
+          </a:p>
+          <a:p>
+            <a:r>
+              <a:rPr lang="zh-CN" altLang="en-US"/>
+              <a:t>（</a:t>
+            </a:r>
+            <a:r>
+              <a:rPr lang="en-US" altLang="zh-CN"/>
+              <a:t>W</a:t>
+            </a:r>
+            <a:r>
+              <a:rPr lang="zh-CN" altLang="en-US"/>
+              <a:t>）</a:t>
+            </a:r>
+            <a:r>
+              <a:rPr lang="en-US" altLang="zh-CN"/>
+              <a:t>-&gt;(</a:t>
+            </a:r>
+            <a:r>
+              <a:rPr lang="zh-CN" altLang="en-US"/>
+              <a:t>相机：右</a:t>
+            </a:r>
+            <a:r>
+              <a:rPr lang="en-US" altLang="zh-CN"/>
+              <a:t>) -&gt;(</a:t>
+            </a:r>
+            <a:r>
+              <a:rPr lang="zh-CN" altLang="en-US"/>
+              <a:t>朝向：右</a:t>
+            </a:r>
+            <a:r>
+              <a:rPr lang="en-US" altLang="zh-CN"/>
+              <a:t>)</a:t>
+            </a:r>
+            <a:endParaRPr lang="zh-CN" altLang="en-US"/>
+          </a:p>
+          <a:p>
+            <a:r>
+              <a:rPr lang="en-US" altLang="zh-CN"/>
+              <a:t>inverse(rot)*d / trans.invertransd</a:t>
+            </a:r>
+            <a:endParaRPr lang="en-US" altLang="zh-CN"/>
+          </a:p>
+          <a:p>
+            <a:r>
+              <a:rPr lang="zh-CN" altLang="en-US"/>
+              <a:t>世界</a:t>
+            </a:r>
+            <a:r>
+              <a:rPr lang="en-US" altLang="zh-CN"/>
+              <a:t> -</a:t>
+            </a:r>
+            <a:r>
+              <a:rPr lang="zh-CN" altLang="en-US"/>
+              <a:t>》局部</a:t>
+            </a:r>
+            <a:r>
+              <a:rPr lang="zh-CN" altLang="en-US">
+                <a:sym typeface="+mn-ea"/>
+              </a:rPr>
+              <a:t>（</a:t>
+            </a:r>
+            <a:r>
+              <a:rPr lang="en-US" altLang="zh-CN">
+                <a:sym typeface="+mn-ea"/>
+              </a:rPr>
+              <a:t>0</a:t>
+            </a:r>
+            <a:r>
+              <a:rPr lang="zh-CN" altLang="en-US">
+                <a:sym typeface="+mn-ea"/>
+              </a:rPr>
+              <a:t>，</a:t>
+            </a:r>
+            <a:r>
+              <a:rPr lang="en-US" altLang="zh-CN">
+                <a:sym typeface="+mn-ea"/>
+              </a:rPr>
+              <a:t>1</a:t>
+            </a:r>
+            <a:r>
+              <a:rPr lang="zh-CN" altLang="en-US">
+                <a:sym typeface="+mn-ea"/>
+              </a:rPr>
+              <a:t>）</a:t>
+            </a:r>
+            <a:r>
+              <a:rPr lang="en-US" altLang="zh-CN">
+                <a:sym typeface="+mn-ea"/>
+              </a:rPr>
+              <a:t>-&gt;(-1,0)</a:t>
+            </a:r>
+            <a:endParaRPr lang="en-US" altLang="zh-CN">
+              <a:sym typeface="+mn-ea"/>
+            </a:endParaRPr>
+          </a:p>
+          <a:p>
+            <a:r>
+              <a:rPr lang="zh-CN" altLang="en-US">
+                <a:sym typeface="+mn-ea"/>
+              </a:rPr>
+              <a:t>世界视角的方向在我视角的情况</a:t>
+            </a:r>
+            <a:endParaRPr lang="zh-CN" altLang="en-US"/>
+          </a:p>
+          <a:p>
+            <a:r>
+              <a:rPr lang="zh-CN" altLang="en-US">
+                <a:sym typeface="+mn-ea"/>
+              </a:rPr>
+              <a:t>（</a:t>
+            </a:r>
+            <a:r>
+              <a:rPr lang="en-US" altLang="zh-CN">
+                <a:sym typeface="+mn-ea"/>
+              </a:rPr>
+              <a:t>W</a:t>
+            </a:r>
+            <a:r>
+              <a:rPr lang="zh-CN" altLang="en-US">
+                <a:sym typeface="+mn-ea"/>
+              </a:rPr>
+              <a:t>）</a:t>
+            </a:r>
+            <a:r>
+              <a:rPr lang="en-US" altLang="zh-CN">
+                <a:sym typeface="+mn-ea"/>
+              </a:rPr>
+              <a:t>-&gt;(</a:t>
+            </a:r>
+            <a:r>
+              <a:rPr lang="zh-CN" altLang="en-US">
+                <a:sym typeface="+mn-ea"/>
+              </a:rPr>
+              <a:t>相机：右</a:t>
+            </a:r>
+            <a:r>
+              <a:rPr lang="en-US" altLang="zh-CN">
+                <a:sym typeface="+mn-ea"/>
+              </a:rPr>
+              <a:t>) -&gt;(</a:t>
+            </a:r>
+            <a:r>
+              <a:rPr lang="zh-CN" altLang="en-US">
+                <a:sym typeface="+mn-ea"/>
+              </a:rPr>
+              <a:t>朝向：左</a:t>
+            </a:r>
+            <a:r>
+              <a:rPr lang="en-US" altLang="zh-CN">
+                <a:sym typeface="+mn-ea"/>
+              </a:rPr>
+              <a:t>)</a:t>
+            </a:r>
+            <a:endParaRPr lang="en-US" altLang="zh-CN"/>
+          </a:p>
+        </p:txBody>
+      </p:sp>
     </p:spTree>
   </p:cSld>
   <p:clrMapOvr>
